--- a/dist/초5/수학/도형과측정/초5_수학_도형과측정_04_직육면체와정육면체.pptx
+++ b/dist/초5/수학/도형과측정/초5_수학_도형과측정_04_직육면체와정육면체.pptx
@@ -121,13 +121,13 @@
   <p:extLst>
     <p:ext uri="{521415D9-36F7-43E2-AB2F-B90AF26B5E84}">
       <p14:sectionLst xmlns:p14="http://schemas.microsoft.com/office/powerpoint/2010/main">
-        <p14:section name="도입" id="{97e2d132-25a4-d3b4-f03b-b0f0b511b9bd}">
+        <p14:section name="도입" id="{9182ab8f-296d-493b-044f-00d4e5f9912b}">
           <p14:sldIdLst>
             <p14:sldId id="256"/>
             <p14:sldId id="257"/>
           </p14:sldIdLst>
         </p14:section>
-        <p14:section name="개념" id="{e27a567f-843e-307f-7c2d-f56823686fbf}">
+        <p14:section name="개념" id="{aed94638-e484-a358-6960-9edcb8de6c78}">
           <p14:sldIdLst>
             <p14:sldId id="258"/>
             <p14:sldId id="259"/>
@@ -136,38 +136,38 @@
             <p14:sldId id="264"/>
           </p14:sldIdLst>
         </p14:section>
-        <p14:section name="연습" id="{155a922f-8431-eec9-663b-02a583719d36}">
+        <p14:section name="연습" id="{156be630-b2b0-1efe-dcb6-7ddcb11775ce}">
           <p14:sldIdLst>
             <p14:sldId id="260"/>
             <p14:sldId id="262"/>
             <p14:sldId id="265"/>
           </p14:sldIdLst>
         </p14:section>
-        <p14:section name="개념" id="{4df21d5a-2e28-7869-d54c-ddfcef0f8cbf}">
+        <p14:section name="개념" id="{fc371feb-ad9d-b140-b4c7-2f8494fda469}">
           <p14:sldIdLst/>
         </p14:section>
-        <p14:section name="연습" id="{5d938aaa-c52e-b51f-25ee-1e52bd5c703b}">
+        <p14:section name="연습" id="{3c887f11-02b1-5493-5d9b-3e8271ba6d60}">
           <p14:sldIdLst/>
         </p14:section>
-        <p14:section name="개념" id="{051a7c4e-cd5e-a19e-78a8-80216ee729c2}">
+        <p14:section name="개념" id="{784f8f57-f869-60cf-980b-905ef11722f0}">
           <p14:sldIdLst/>
         </p14:section>
-        <p14:section name="연습" id="{a50a397e-624d-fd14-59e6-4a7e3531dfc7}">
+        <p14:section name="연습" id="{c80da0e8-92d3-74c6-b0e1-ca9466af77b9}">
           <p14:sldIdLst/>
         </p14:section>
-        <p14:section name="확인" id="{51cb3694-0abe-2c8a-4658-bae99417ed96}">
+        <p14:section name="확인" id="{e28a59c3-0e50-a09f-bd64-1f7601b96987}">
           <p14:sldIdLst>
             <p14:sldId id="266"/>
             <p14:sldId id="267"/>
             <p14:sldId id="268"/>
           </p14:sldIdLst>
         </p14:section>
-        <p14:section name="정리" id="{f6d0cef9-cfa8-00af-69f0-6152a86dd6e1}">
+        <p14:section name="정리" id="{68cf6842-38f3-83f5-a41c-05e855d0ac80}">
           <p14:sldIdLst>
             <p14:sldId id="269"/>
           </p14:sldIdLst>
         </p14:section>
-        <p14:section name="보충" id="{6bdc610d-efd4-4681-a8fc-a498bba4d11a}">
+        <p14:section name="보충" id="{6303176d-c8d7-d860-4d0e-cb694774a570}">
           <p14:sldIdLst>
             <p14:sldId id="270"/>
           </p14:sldIdLst>
@@ -683,7 +683,7 @@
 - “면 가를 세우고 면 라까지 차례로 접으면 점 ㄱ은 어디와 만날까?”
 정답
 - ① 가, 나, 다, 라 (마주 보는 면 바를 뺀 4개)
-- ② 점 ㄹ
+- ② 점 ㄹ (이름이 없는 면 바의 왼쪽 위 꼭짓점도 같은 꼭짓점에서 만남: 한 꼭짓점에 면 3개가 모임)
 - ③ 선분 ㄹㄷ (점 ㄱ은 ㄹ, 점 ㄴ은 ㄷ과 만남, 길이 3 cm로 같음)
 막히면
 - 활동지 3쪽 뒷면이나 모눈종이에 같은 전개도를 그려 오려서 접어 봅니다.
@@ -4611,7 +4611,7 @@
         </p:nvSpPr>
         <p:spPr>
           <a:xfrm>
-            <a:off x="6584123" y="2333306"/>
+            <a:off x="6536708" y="2285891"/>
             <a:ext cx="483108" cy="476250"/>
           </a:xfrm>
           <a:prstGeom prst="rect">
@@ -4650,7 +4650,7 @@
         </p:nvSpPr>
         <p:spPr>
           <a:xfrm>
-            <a:off x="6584123" y="3636964"/>
+            <a:off x="6536708" y="3684379"/>
             <a:ext cx="483108" cy="476250"/>
           </a:xfrm>
           <a:prstGeom prst="rect">
@@ -4689,7 +4689,7 @@
         </p:nvSpPr>
         <p:spPr>
           <a:xfrm>
-            <a:off x="10850437" y="3636964"/>
+            <a:off x="10897852" y="3684379"/>
             <a:ext cx="483108" cy="476250"/>
           </a:xfrm>
           <a:prstGeom prst="rect">
@@ -4728,7 +4728,7 @@
         </p:nvSpPr>
         <p:spPr>
           <a:xfrm>
-            <a:off x="10850437" y="2333306"/>
+            <a:off x="10897852" y="2285891"/>
             <a:ext cx="483108" cy="476250"/>
           </a:xfrm>
           <a:prstGeom prst="rect">
@@ -5176,7 +5176,7 @@
                 <a:ea typeface="맑은 고딕" pitchFamily="34" charset="-122"/>
                 <a:cs typeface="맑은 고딕" pitchFamily="34" charset="-120"/>
               </a:rPr>
-              <a:t>점 ㄱ과 만나는</a:t>
+              <a:t>점 ㄱ과 만나는 점은?</a:t>
             </a:r>
             <a:endParaRPr lang="ko-KR" sz="2800" dirty="0"/>
           </a:p>
@@ -5193,7 +5193,7 @@
                 <a:ea typeface="맑은 고딕" pitchFamily="34" charset="-122"/>
                 <a:cs typeface="맑은 고딕" pitchFamily="34" charset="-120"/>
               </a:rPr>
-              <a:t>점은?</a:t>
+              <a:t>(ㄴ, ㄷ, ㄹ 중)</a:t>
             </a:r>
             <a:endParaRPr lang="ko-KR" sz="2800" dirty="0"/>
           </a:p>
